--- a/public/fun/pack/pptx/newspro/카드뉴스프리미엄_07_건강·안심습관_피치코퍼.pptx
+++ b/public/fun/pack/pptx/newspro/카드뉴스프리미엄_07_건강·안심습관_피치코퍼.pptx
@@ -113,12 +113,12 @@
   <p:extLst>
     <p:ext uri="{521415D9-36F7-43E2-AB2F-B90AF26B5E84}">
       <p14:sectionLst xmlns:p14="http://schemas.microsoft.com/office/powerpoint/2010/main">
-        <p14:section name="시작" id="{FCCD268B-AC6F-4253-ABDF-C9E90170B9B5}">
+        <p14:section name="시작" id="{4B37ED90-D4FD-47E1-9C63-E5E198BC9347}">
           <p14:sldIdLst>
             <p14:sldId id="256"/>
           </p14:sldIdLst>
         </p14:section>
-        <p14:section name="본문" id="{F0A91AA0-5251-4C77-8570-E5975D22FF84}">
+        <p14:section name="본문" id="{36A48CE7-86A5-4214-9E6F-00ABFB975612}">
           <p14:sldIdLst>
             <p14:sldId id="257"/>
             <p14:sldId id="258"/>
@@ -127,7 +127,7 @@
             <p14:sldId id="261"/>
           </p14:sldIdLst>
         </p14:section>
-        <p14:section name="마무리" id="{BCADA2E1-FCCF-4872-8C4D-573A645EA3BD}">
+        <p14:section name="마무리" id="{5F0DF223-B939-42E6-A0C8-133A43FF4921}">
           <p14:sldIdLst>
             <p14:sldId id="262"/>
           </p14:sldIdLst>
@@ -1559,7 +1559,7 @@
             </a:lvl1pPr>
           </a:lstStyle>
           <a:p>
-            <a:fld id="{F7CDA6FC-D621-4AFC-84FD-15E3DA7D87E5}" type="slidenum">
+            <a:fld id="{3DEAA3FA-EAF0-4426-8ADC-15A258BE2F40}" type="slidenum">
               <a:rPr lang="en-US"/>
               <a:t>‹#›</a:t>
             </a:fld>
@@ -2253,7 +2253,7 @@
             </a:lvl1pPr>
           </a:lstStyle>
           <a:p>
-            <a:fld id="{242A2834-9388-4998-9E8A-BA09BECE2E82}" type="slidenum">
+            <a:fld id="{3D4BD8D1-319A-432D-A3F6-B1BA0E7ED767}" type="slidenum">
               <a:rPr lang="en-US"/>
               <a:t>‹#›</a:t>
             </a:fld>
@@ -2934,7 +2934,7 @@
             </a:lvl1pPr>
           </a:lstStyle>
           <a:p>
-            <a:fld id="{C1034B6A-31D2-4867-9DFA-9FCD9DE260F0}" type="slidenum">
+            <a:fld id="{9575BFDA-2741-4192-B019-2AB08F916023}" type="slidenum">
               <a:rPr lang="en-US"/>
               <a:t>‹#›</a:t>
             </a:fld>
@@ -3882,7 +3882,7 @@
           <a:bodyPr/>
           <a:lstStyle/>
           <a:p>
-            <a:fld id="{31A3911B-7891-4053-8879-059D7E4ED10E}" type="slidenum">
+            <a:fld id="{262DFAE9-E9B4-44EE-867A-8625B7CBEAC8}" type="slidenum">
               <a:rPr lang="en-US"/>
               <a:t>‹#›</a:t>
             </a:fld>
@@ -4048,7 +4048,7 @@
           <a:bodyPr/>
           <a:lstStyle/>
           <a:p>
-            <a:fld id="{73E35479-8C6E-401E-9697-F4D279CC908F}" type="slidenum">
+            <a:fld id="{1961A5BF-7847-4198-AE2F-9BE340D91362}" type="slidenum">
               <a:rPr lang="en-US"/>
               <a:t>‹#›</a:t>
             </a:fld>
@@ -4214,7 +4214,7 @@
           <a:bodyPr/>
           <a:lstStyle/>
           <a:p>
-            <a:fld id="{EB65D12F-7C54-4A7A-8F3C-A288A1442044}" type="slidenum">
+            <a:fld id="{B6F7BE87-C629-4469-A199-EBEE8199761A}" type="slidenum">
               <a:rPr lang="en-US"/>
               <a:t>‹#›</a:t>
             </a:fld>
@@ -4380,7 +4380,7 @@
           <a:bodyPr/>
           <a:lstStyle/>
           <a:p>
-            <a:fld id="{AD166459-A073-4828-9C7D-1B73539A63C8}" type="slidenum">
+            <a:fld id="{C5F4B633-EE00-4E77-8D4F-44DBEC096037}" type="slidenum">
               <a:rPr lang="en-US"/>
               <a:t>‹#›</a:t>
             </a:fld>
@@ -4546,7 +4546,7 @@
           <a:bodyPr/>
           <a:lstStyle/>
           <a:p>
-            <a:fld id="{23458DEC-EA98-491B-A60E-C801A0912D28}" type="slidenum">
+            <a:fld id="{D72862AE-5D6E-4BDD-B990-F367D2EE474C}" type="slidenum">
               <a:rPr lang="en-US"/>
               <a:t>‹#›</a:t>
             </a:fld>
